--- a/PRJ13797_JMUX_OnePager_Mar24.pptx
+++ b/PRJ13797_JMUX_OnePager_Mar24.pptx
@@ -7278,7 +7278,7 @@
                 <a:latin typeface="Arial" panose="020B0604020202020204" pitchFamily="34" charset="0"/>
                 <a:ea typeface="Times New Roman" panose="02020603050405020304" pitchFamily="18" charset="0"/>
               </a:rPr>
-              <a:t>NSP Hicksville equipment wiring in progress; wire drops to equipment being completed this week.</a:t>
+              <a:t>NSP Hicksville equipment wiring completed by Hawkeye on 03/24. Equipment now ready for Nokia configuration.</a:t>
             </a:r>
           </a:p>
           <a:p>
@@ -7366,7 +7366,7 @@
                 <a:latin typeface="Arial" panose="020B0604020202020204" pitchFamily="34" charset="0"/>
                 <a:ea typeface="Times New Roman" panose="02020603050405020304" pitchFamily="18" charset="0"/>
               </a:rPr>
-              <a:t>Nokia training courses selected with Shelton (Nokia). Awaiting Glenn Leaming approval; dates to be confirmed by 03/27.</a:t>
+              <a:t>Nokia training courses selected with Shelton. Awaiting confirmed training dates from Glenn Leaming (traveling, back 03/25). Confirmation expected by 03/27.</a:t>
             </a:r>
           </a:p>
           <a:p>
